--- a/classes/parte-2-deep-learning/170-tensorflow-js-navegador/clase-170-tensorflow-js-navegador-presentacion.pptx
+++ b/classes/parte-2-deep-learning/170-tensorflow-js-navegador/clase-170-tensorflow-js-navegador-presentacion.pptx
@@ -4801,7 +4801,7 @@
                 </a:solidFill>
                 <a:latin typeface="Segoe UI"/>
               </a:rPr>
-              <a:t>Primer bloque ejecutable del notebook.</a:t>
+              <a:t>Con la CLI (más común): `bash tensorflowjs_converter --input_format=keras_saved_model servable/ tfjs_model/</a:t>
             </a:r>
           </a:p>
         </p:txBody>
@@ -4888,7 +4888,254 @@
                 </a:solidFill>
                 <a:latin typeface="Courier New"/>
               </a:rPr>
-              <a:t># Imports y configuración inicial</a:t>
+              <a:t>try:</a:t>
+            </a:r>
+          </a:p>
+          <a:p>
+            <a:pPr>
+              <a:defRPr sz="1200" b="0">
+                <a:solidFill>
+                  <a:srgbClr val="F8FAFC"/>
+                </a:solidFill>
+                <a:latin typeface="Courier New"/>
+              </a:defRPr>
+            </a:pPr>
+            <a:r>
+              <a:rPr sz="1200" b="0">
+                <a:solidFill>
+                  <a:srgbClr val="F8FAFC"/>
+                </a:solidFill>
+                <a:latin typeface="Courier New"/>
+              </a:rPr>
+              <a:t>    import tensorflowjs as tfjs</a:t>
+            </a:r>
+          </a:p>
+          <a:p>
+            <a:pPr>
+              <a:defRPr sz="1200" b="0">
+                <a:solidFill>
+                  <a:srgbClr val="F8FAFC"/>
+                </a:solidFill>
+                <a:latin typeface="Courier New"/>
+              </a:defRPr>
+            </a:pPr>
+            <a:r>
+              <a:rPr sz="1200" b="0">
+                <a:solidFill>
+                  <a:srgbClr val="F8FAFC"/>
+                </a:solidFill>
+                <a:latin typeface="Courier New"/>
+              </a:rPr>
+              <a:t>    from tensorflow import keras</a:t>
+            </a:r>
+          </a:p>
+          <a:p>
+            <a:pPr>
+              <a:defRPr sz="1200" b="0">
+                <a:solidFill>
+                  <a:srgbClr val="F8FAFC"/>
+                </a:solidFill>
+                <a:latin typeface="Courier New"/>
+              </a:defRPr>
+            </a:pPr>
+            <a:r>
+              <a:rPr sz="1200" b="0">
+                <a:solidFill>
+                  <a:srgbClr val="F8FAFC"/>
+                </a:solidFill>
+                <a:latin typeface="Courier New"/>
+              </a:rPr>
+              <a:t>    TFJS_OK = True</a:t>
+            </a:r>
+          </a:p>
+          <a:p>
+            <a:pPr>
+              <a:defRPr sz="1200" b="0">
+                <a:solidFill>
+                  <a:srgbClr val="F8FAFC"/>
+                </a:solidFill>
+                <a:latin typeface="Courier New"/>
+              </a:defRPr>
+            </a:pPr>
+            <a:r>
+              <a:rPr sz="1200" b="0">
+                <a:solidFill>
+                  <a:srgbClr val="F8FAFC"/>
+                </a:solidFill>
+                <a:latin typeface="Courier New"/>
+              </a:rPr>
+              <a:t>except Exception:</a:t>
+            </a:r>
+          </a:p>
+          <a:p>
+            <a:pPr>
+              <a:defRPr sz="1200" b="0">
+                <a:solidFill>
+                  <a:srgbClr val="F8FAFC"/>
+                </a:solidFill>
+                <a:latin typeface="Courier New"/>
+              </a:defRPr>
+            </a:pPr>
+            <a:r>
+              <a:rPr sz="1200" b="0">
+                <a:solidFill>
+                  <a:srgbClr val="F8FAFC"/>
+                </a:solidFill>
+                <a:latin typeface="Courier New"/>
+              </a:rPr>
+              <a:t>    TFJS_OK = False</a:t>
+            </a:r>
+          </a:p>
+          <a:p>
+            <a:pPr>
+              <a:defRPr sz="1200" b="0">
+                <a:solidFill>
+                  <a:srgbClr val="F8FAFC"/>
+                </a:solidFill>
+                <a:latin typeface="Courier New"/>
+              </a:defRPr>
+            </a:pPr>
+            <a:r>
+              <a:rPr sz="1200" b="0">
+                <a:solidFill>
+                  <a:srgbClr val="F8FAFC"/>
+                </a:solidFill>
+                <a:latin typeface="Courier New"/>
+              </a:rPr>
+              <a:t>    print("tensorflowjs no instalado -&gt; conversion via CLI/API (no se ejecuta)")</a:t>
+            </a:r>
+          </a:p>
+          <a:p>
+            <a:pPr>
+              <a:defRPr sz="1200" b="0">
+                <a:solidFill>
+                  <a:srgbClr val="F8FAFC"/>
+                </a:solidFill>
+                <a:latin typeface="Courier New"/>
+              </a:defRPr>
+            </a:pPr>
+            <a:r>
+              <a:rPr sz="1200" b="0">
+                <a:solidFill>
+                  <a:srgbClr val="F8FAFC"/>
+                </a:solidFill>
+                <a:latin typeface="Courier New"/>
+              </a:rPr>
+              <a:t> </a:t>
+            </a:r>
+          </a:p>
+          <a:p>
+            <a:pPr>
+              <a:defRPr sz="1200" b="0">
+                <a:solidFill>
+                  <a:srgbClr val="F8FAFC"/>
+                </a:solidFill>
+                <a:latin typeface="Courier New"/>
+              </a:defRPr>
+            </a:pPr>
+            <a:r>
+              <a:rPr sz="1200" b="0">
+                <a:solidFill>
+                  <a:srgbClr val="F8FAFC"/>
+                </a:solidFill>
+                <a:latin typeface="Courier New"/>
+              </a:rPr>
+              <a:t>if TFJS_OK:</a:t>
+            </a:r>
+          </a:p>
+          <a:p>
+            <a:pPr>
+              <a:defRPr sz="1200" b="0">
+                <a:solidFill>
+                  <a:srgbClr val="F8FAFC"/>
+                </a:solidFill>
+                <a:latin typeface="Courier New"/>
+              </a:defRPr>
+            </a:pPr>
+            <a:r>
+              <a:rPr sz="1200" b="0">
+                <a:solidFill>
+                  <a:srgbClr val="F8FAFC"/>
+                </a:solidFill>
+                <a:latin typeface="Courier New"/>
+              </a:rPr>
+              <a:t>    model = keras.models.load_model("model.keras")</a:t>
+            </a:r>
+          </a:p>
+          <a:p>
+            <a:pPr>
+              <a:defRPr sz="1200" b="0">
+                <a:solidFill>
+                  <a:srgbClr val="F8FAFC"/>
+                </a:solidFill>
+                <a:latin typeface="Courier New"/>
+              </a:defRPr>
+            </a:pPr>
+            <a:r>
+              <a:rPr sz="1200" b="0">
+                <a:solidFill>
+                  <a:srgbClr val="F8FAFC"/>
+                </a:solidFill>
+                <a:latin typeface="Courier New"/>
+              </a:rPr>
+              <a:t>    tfjs.converters.save_keras_model(model, "tfjs_model/")   # equivalente Python de la CLI</a:t>
+            </a:r>
+          </a:p>
+          <a:p>
+            <a:pPr>
+              <a:defRPr sz="1200" b="0">
+                <a:solidFill>
+                  <a:srgbClr val="F8FAFC"/>
+                </a:solidFill>
+                <a:latin typeface="Courier New"/>
+              </a:defRPr>
+            </a:pPr>
+            <a:r>
+              <a:rPr sz="1200" b="0">
+                <a:solidFill>
+                  <a:srgbClr val="F8FAFC"/>
+                </a:solidFill>
+                <a:latin typeface="Courier New"/>
+              </a:rPr>
+              <a:t>    print("modelo convertido en tfjs_model/ (model.json + pesos .bin)")</a:t>
+            </a:r>
+          </a:p>
+          <a:p>
+            <a:pPr>
+              <a:defRPr sz="1200" b="0">
+                <a:solidFill>
+                  <a:srgbClr val="F8FAFC"/>
+                </a:solidFill>
+                <a:latin typeface="Courier New"/>
+              </a:defRPr>
+            </a:pPr>
+            <a:r>
+              <a:rPr sz="1200" b="0">
+                <a:solidFill>
+                  <a:srgbClr val="F8FAFC"/>
+                </a:solidFill>
+                <a:latin typeface="Courier New"/>
+              </a:rPr>
+              <a:t>else:</a:t>
+            </a:r>
+          </a:p>
+          <a:p>
+            <a:pPr>
+              <a:defRPr sz="1200" b="0">
+                <a:solidFill>
+                  <a:srgbClr val="F8FAFC"/>
+                </a:solidFill>
+                <a:latin typeface="Courier New"/>
+              </a:defRPr>
+            </a:pPr>
+            <a:r>
+              <a:rPr sz="1200" b="0">
+                <a:solidFill>
+                  <a:srgbClr val="F8FAFC"/>
+                </a:solidFill>
+                <a:latin typeface="Courier New"/>
+              </a:rPr>
+              <a:t>    print("tfjs.converters.save_keras_model(model, 'tfjs_model/')")</a:t>
             </a:r>
           </a:p>
         </p:txBody>

--- a/classes/parte-2-deep-learning/170-tensorflow-js-navegador/clase-170-tensorflow-js-navegador-presentacion.pptx
+++ b/classes/parte-2-deep-learning/170-tensorflow-js-navegador/clase-170-tensorflow-js-navegador-presentacion.pptx
@@ -3272,7 +3272,7 @@
                 </a:solidFill>
                 <a:latin typeface="Segoe UI"/>
               </a:rPr>
-              <a:t>Parte: 2 — Deep Learning · Fuente: Géron, cap. 19 § Running a Model in a Web Page + TF.js docs.  Duración estimada: 55 min.</a:t>
+              <a:t>Parte: 2 — Deep Learning · Fuente: Géron, cap. 19 § Running a Model in a Web Page + TF.js docs.  Duración estimada: 55 min. · Nivel: Avanzado</a:t>
             </a:r>
           </a:p>
         </p:txBody>
@@ -3581,7 +3581,7 @@
                 </a:solidFill>
                 <a:latin typeface="Segoe UI"/>
               </a:rPr>
-              <a:t>Parte: 2 — Deep Learning · Fuente: Géron, cap. 19 § Running a Model in a Web Page + TF.js docs.  Duración estimada: 55 min.</a:t>
+              <a:t>Parte: 2 — Deep Learning · Fuente: Géron, cap. 19 § Running a Model in a Web Page + TF.js docs.  Duración estimada: 55 min. · Nivel: Avanzado</a:t>
             </a:r>
           </a:p>
         </p:txBody>
